--- a/Lab_4/assets/Lab4_G2.pptx
+++ b/Lab_4/assets/Lab4_G2.pptx
@@ -5,7 +5,7 @@
     <p:sldMasterId id="2147483648" r:id="rId1"/>
   </p:sldMasterIdLst>
   <p:notesMasterIdLst>
-    <p:notesMasterId r:id="rId21"/>
+    <p:notesMasterId r:id="rId23"/>
   </p:notesMasterIdLst>
   <p:sldIdLst>
     <p:sldId id="256" r:id="rId2"/>
@@ -22,11 +22,13 @@
     <p:sldId id="331" r:id="rId13"/>
     <p:sldId id="311" r:id="rId14"/>
     <p:sldId id="307" r:id="rId15"/>
-    <p:sldId id="472" r:id="rId16"/>
-    <p:sldId id="1046" r:id="rId17"/>
-    <p:sldId id="473" r:id="rId18"/>
-    <p:sldId id="474" r:id="rId19"/>
-    <p:sldId id="332" r:id="rId20"/>
+    <p:sldId id="1045" r:id="rId16"/>
+    <p:sldId id="471" r:id="rId17"/>
+    <p:sldId id="472" r:id="rId18"/>
+    <p:sldId id="1046" r:id="rId19"/>
+    <p:sldId id="473" r:id="rId20"/>
+    <p:sldId id="474" r:id="rId21"/>
+    <p:sldId id="332" r:id="rId22"/>
   </p:sldIdLst>
   <p:sldSz cx="12192000" cy="6858000"/>
   <p:notesSz cx="6858000" cy="9144000"/>
@@ -215,7 +217,7 @@
           <a:p>
             <a:fld id="{F5049794-C84E-4082-8D4E-5398E1A45EA7}" type="datetimeFigureOut">
               <a:rPr lang="en-US" smtClean="0"/>
-              <a:t>9/24/2025</a:t>
+              <a:t>10/10/2025</a:t>
             </a:fld>
             <a:endParaRPr lang="en-US"/>
           </a:p>
@@ -629,7 +631,7 @@
           <a:p>
             <a:fld id="{5871C1B8-AD85-425D-A891-7F7F61302E2F}" type="datetime1">
               <a:rPr lang="en-US" smtClean="0"/>
-              <a:t>9/24/2025</a:t>
+              <a:t>10/10/2025</a:t>
             </a:fld>
             <a:endParaRPr lang="en-US"/>
           </a:p>
@@ -827,7 +829,7 @@
           <a:p>
             <a:fld id="{20FF004B-D373-4ACF-8E4D-48BE0C605F2C}" type="datetime1">
               <a:rPr lang="en-US" smtClean="0"/>
-              <a:t>9/24/2025</a:t>
+              <a:t>10/10/2025</a:t>
             </a:fld>
             <a:endParaRPr lang="en-US"/>
           </a:p>
@@ -1035,7 +1037,7 @@
           <a:p>
             <a:fld id="{11975FD9-FC47-40E4-9D7D-6C72459C26E6}" type="datetime1">
               <a:rPr lang="en-US" smtClean="0"/>
-              <a:t>9/24/2025</a:t>
+              <a:t>10/10/2025</a:t>
             </a:fld>
             <a:endParaRPr lang="en-US"/>
           </a:p>
@@ -1255,7 +1257,7 @@
           <a:p>
             <a:fld id="{85A7C1C3-5378-46F6-AA21-02B58FE971C6}" type="datetime1">
               <a:rPr lang="en-US" smtClean="0"/>
-              <a:t>9/24/2025</a:t>
+              <a:t>10/10/2025</a:t>
             </a:fld>
             <a:endParaRPr lang="en-US"/>
           </a:p>
@@ -1615,7 +1617,7 @@
           <a:p>
             <a:fld id="{B49A1A5E-9C33-4F86-80D9-4BAED0911429}" type="datetime1">
               <a:rPr lang="en-US" smtClean="0"/>
-              <a:t>9/24/2025</a:t>
+              <a:t>10/10/2025</a:t>
             </a:fld>
             <a:endParaRPr lang="en-US"/>
           </a:p>
@@ -1880,7 +1882,7 @@
           <a:p>
             <a:fld id="{CAA102CB-F384-4A4C-82B8-79D60BFA27C5}" type="datetime1">
               <a:rPr lang="en-US" smtClean="0"/>
-              <a:t>9/24/2025</a:t>
+              <a:t>10/10/2025</a:t>
             </a:fld>
             <a:endParaRPr lang="en-US"/>
           </a:p>
@@ -2292,7 +2294,7 @@
           <a:p>
             <a:fld id="{16011134-CF07-4806-AC2D-C4CF86D8AF9B}" type="datetime1">
               <a:rPr lang="en-US" smtClean="0"/>
-              <a:t>9/24/2025</a:t>
+              <a:t>10/10/2025</a:t>
             </a:fld>
             <a:endParaRPr lang="en-US"/>
           </a:p>
@@ -2433,7 +2435,7 @@
           <a:p>
             <a:fld id="{E3767434-8F23-4DD5-BD51-853123BE4FA3}" type="datetime1">
               <a:rPr lang="en-US" smtClean="0"/>
-              <a:t>9/24/2025</a:t>
+              <a:t>10/10/2025</a:t>
             </a:fld>
             <a:endParaRPr lang="en-US"/>
           </a:p>
@@ -2546,7 +2548,7 @@
           <a:p>
             <a:fld id="{594F706E-2165-4BB6-98D7-C9EE277D9AF2}" type="datetime1">
               <a:rPr lang="en-US" smtClean="0"/>
-              <a:t>9/24/2025</a:t>
+              <a:t>10/10/2025</a:t>
             </a:fld>
             <a:endParaRPr lang="en-US"/>
           </a:p>
@@ -2857,7 +2859,7 @@
           <a:p>
             <a:fld id="{9C8749A3-5F0E-45E0-B660-E2BE0FDEF0DF}" type="datetime1">
               <a:rPr lang="en-US" smtClean="0"/>
-              <a:t>9/24/2025</a:t>
+              <a:t>10/10/2025</a:t>
             </a:fld>
             <a:endParaRPr lang="en-US"/>
           </a:p>
@@ -3145,7 +3147,7 @@
           <a:p>
             <a:fld id="{1C0F3D22-82D8-46A7-A4C0-7A6FA54084BE}" type="datetime1">
               <a:rPr lang="en-US" smtClean="0"/>
-              <a:t>9/24/2025</a:t>
+              <a:t>10/10/2025</a:t>
             </a:fld>
             <a:endParaRPr lang="en-US"/>
           </a:p>
@@ -3386,7 +3388,7 @@
           <a:p>
             <a:fld id="{64B2897B-F47E-49C0-A30B-118D7B86E5F3}" type="datetime1">
               <a:rPr lang="en-US" smtClean="0"/>
-              <a:t>9/24/2025</a:t>
+              <a:t>10/10/2025</a:t>
             </a:fld>
             <a:endParaRPr lang="en-US"/>
           </a:p>
@@ -5920,7 +5922,13 @@
   <p:cSld>
     <p:spTree>
       <p:nvGrpSpPr>
-        <p:cNvPr id="1" name=""/>
+        <p:cNvPr id="1" name="">
+          <a:extLst>
+            <a:ext uri="{FF2B5EF4-FFF2-40B4-BE49-F238E27FC236}">
+              <a16:creationId xmlns:a16="http://schemas.microsoft.com/office/drawing/2014/main" id="{08D48A58-2B62-7E57-1AE3-C71F3574A040}"/>
+            </a:ext>
+          </a:extLst>
+        </p:cNvPr>
         <p:cNvGrpSpPr/>
         <p:nvPr/>
       </p:nvGrpSpPr>
@@ -5937,7 +5945,7 @@
           <p:cNvPr id="22" name="Title 21">
             <a:extLst>
               <a:ext uri="{FF2B5EF4-FFF2-40B4-BE49-F238E27FC236}">
-                <a16:creationId xmlns:a16="http://schemas.microsoft.com/office/drawing/2014/main" id="{67F29B7B-4A52-05C2-D424-998CF01F4F38}"/>
+                <a16:creationId xmlns:a16="http://schemas.microsoft.com/office/drawing/2014/main" id="{F1BEA3F3-B8E5-C86F-C15B-5DFBD468F65B}"/>
               </a:ext>
             </a:extLst>
           </p:cNvPr>
@@ -5957,7 +5965,7 @@
           <a:p>
             <a:r>
               <a:rPr lang="en-US" dirty="0"/>
-              <a:t>Assignment: Hu Moments</a:t>
+              <a:t>Statistical Moments</a:t>
             </a:r>
           </a:p>
         </p:txBody>
@@ -5967,7 +5975,7 @@
           <p:cNvPr id="2" name="Footer Placeholder 1">
             <a:extLst>
               <a:ext uri="{FF2B5EF4-FFF2-40B4-BE49-F238E27FC236}">
-                <a16:creationId xmlns:a16="http://schemas.microsoft.com/office/drawing/2014/main" id="{4EDA084C-98D6-1C24-9FC4-35FA8E1AD919}"/>
+                <a16:creationId xmlns:a16="http://schemas.microsoft.com/office/drawing/2014/main" id="{92858A7D-FF52-E21F-4328-FEB07CD6E6AE}"/>
               </a:ext>
             </a:extLst>
           </p:cNvPr>
@@ -6004,7 +6012,7 @@
           <p:cNvPr id="3" name="Slide Number Placeholder 2">
             <a:extLst>
               <a:ext uri="{FF2B5EF4-FFF2-40B4-BE49-F238E27FC236}">
-                <a16:creationId xmlns:a16="http://schemas.microsoft.com/office/drawing/2014/main" id="{5A864C0E-0C89-52EB-74A1-89756294805B}"/>
+                <a16:creationId xmlns:a16="http://schemas.microsoft.com/office/drawing/2014/main" id="{3FF16394-7B9B-797A-046A-81C7EA718ED2}"/>
               </a:ext>
             </a:extLst>
           </p:cNvPr>
@@ -6037,6 +6045,1297 @@
                 <a:defRPr/>
               </a:pPr>
               <a:t>15</a:t>
+            </a:fld>
+            <a:endParaRPr lang="en-US">
+              <a:solidFill>
+                <a:srgbClr val="DD8047">
+                  <a:lumMod val="50000"/>
+                </a:srgbClr>
+              </a:solidFill>
+            </a:endParaRPr>
+          </a:p>
+        </p:txBody>
+      </p:sp>
+      <p:pic>
+        <p:nvPicPr>
+          <p:cNvPr id="5" name="Picture 4">
+            <a:extLst>
+              <a:ext uri="{FF2B5EF4-FFF2-40B4-BE49-F238E27FC236}">
+                <a16:creationId xmlns:a16="http://schemas.microsoft.com/office/drawing/2014/main" id="{830D0797-E564-4136-CC5E-BBB2AA05222C}"/>
+              </a:ext>
+            </a:extLst>
+          </p:cNvPr>
+          <p:cNvPicPr>
+            <a:picLocks noChangeAspect="1"/>
+          </p:cNvPicPr>
+          <p:nvPr/>
+        </p:nvPicPr>
+        <p:blipFill>
+          <a:blip r:embed="rId2"/>
+          <a:stretch>
+            <a:fillRect/>
+          </a:stretch>
+        </p:blipFill>
+        <p:spPr>
+          <a:xfrm>
+            <a:off x="918686" y="1383419"/>
+            <a:ext cx="2794115" cy="1000683"/>
+          </a:xfrm>
+          <a:prstGeom prst="rect">
+            <a:avLst/>
+          </a:prstGeom>
+        </p:spPr>
+      </p:pic>
+      <p:pic>
+        <p:nvPicPr>
+          <p:cNvPr id="7" name="Picture 6">
+            <a:extLst>
+              <a:ext uri="{FF2B5EF4-FFF2-40B4-BE49-F238E27FC236}">
+                <a16:creationId xmlns:a16="http://schemas.microsoft.com/office/drawing/2014/main" id="{7BD709CA-25F1-92AA-B3DD-038374DF1DDE}"/>
+              </a:ext>
+            </a:extLst>
+          </p:cNvPr>
+          <p:cNvPicPr>
+            <a:picLocks noChangeAspect="1"/>
+          </p:cNvPicPr>
+          <p:nvPr/>
+        </p:nvPicPr>
+        <p:blipFill>
+          <a:blip r:embed="rId3"/>
+          <a:stretch>
+            <a:fillRect/>
+          </a:stretch>
+        </p:blipFill>
+        <p:spPr>
+          <a:xfrm>
+            <a:off x="1054100" y="2533078"/>
+            <a:ext cx="3049286" cy="864170"/>
+          </a:xfrm>
+          <a:prstGeom prst="rect">
+            <a:avLst/>
+          </a:prstGeom>
+        </p:spPr>
+      </p:pic>
+      <p:pic>
+        <p:nvPicPr>
+          <p:cNvPr id="9" name="Picture 8">
+            <a:extLst>
+              <a:ext uri="{FF2B5EF4-FFF2-40B4-BE49-F238E27FC236}">
+                <a16:creationId xmlns:a16="http://schemas.microsoft.com/office/drawing/2014/main" id="{4A1BE4BF-71DE-343E-8CBD-DDF56EC5E772}"/>
+              </a:ext>
+            </a:extLst>
+          </p:cNvPr>
+          <p:cNvPicPr>
+            <a:picLocks noChangeAspect="1"/>
+          </p:cNvPicPr>
+          <p:nvPr/>
+        </p:nvPicPr>
+        <p:blipFill>
+          <a:blip r:embed="rId4"/>
+          <a:stretch>
+            <a:fillRect/>
+          </a:stretch>
+        </p:blipFill>
+        <p:spPr>
+          <a:xfrm>
+            <a:off x="1014329" y="4060684"/>
+            <a:ext cx="3556172" cy="807673"/>
+          </a:xfrm>
+          <a:prstGeom prst="rect">
+            <a:avLst/>
+          </a:prstGeom>
+        </p:spPr>
+      </p:pic>
+      <p:sp>
+        <p:nvSpPr>
+          <p:cNvPr id="11" name="TextBox 10">
+            <a:extLst>
+              <a:ext uri="{FF2B5EF4-FFF2-40B4-BE49-F238E27FC236}">
+                <a16:creationId xmlns:a16="http://schemas.microsoft.com/office/drawing/2014/main" id="{48DBD56F-1CF3-636C-C7DA-75D615FAF672}"/>
+              </a:ext>
+            </a:extLst>
+          </p:cNvPr>
+          <p:cNvSpPr txBox="1"/>
+          <p:nvPr/>
+        </p:nvSpPr>
+        <p:spPr>
+          <a:xfrm>
+            <a:off x="1054743" y="1179402"/>
+            <a:ext cx="1524000" cy="646331"/>
+          </a:xfrm>
+          <a:prstGeom prst="rect">
+            <a:avLst/>
+          </a:prstGeom>
+          <a:noFill/>
+        </p:spPr>
+        <p:txBody>
+          <a:bodyPr wrap="square">
+            <a:spAutoFit/>
+          </a:bodyPr>
+          <a:lstStyle/>
+          <a:p>
+            <a:r>
+              <a:rPr lang="en-US" sz="1800" b="0" i="0" dirty="0">
+                <a:solidFill>
+                  <a:srgbClr val="000000"/>
+                </a:solidFill>
+                <a:effectLst/>
+                <a:latin typeface="AdvP3E9109"/>
+              </a:rPr>
+              <a:t>n</a:t>
+            </a:r>
+            <a:r>
+              <a:rPr lang="en-US" sz="1800" b="0" i="0" dirty="0">
+                <a:solidFill>
+                  <a:srgbClr val="000000"/>
+                </a:solidFill>
+                <a:effectLst/>
+                <a:latin typeface="AdvP4B45E8"/>
+              </a:rPr>
+              <a:t>th moment</a:t>
+            </a:r>
+            <a:r>
+              <a:rPr lang="en-US" dirty="0"/>
+              <a:t> </a:t>
+            </a:r>
+            <a:br>
+              <a:rPr lang="en-US" dirty="0"/>
+            </a:br>
+            <a:endParaRPr lang="en-US" dirty="0"/>
+          </a:p>
+        </p:txBody>
+      </p:sp>
+      <p:sp>
+        <p:nvSpPr>
+          <p:cNvPr id="13" name="TextBox 12">
+            <a:extLst>
+              <a:ext uri="{FF2B5EF4-FFF2-40B4-BE49-F238E27FC236}">
+                <a16:creationId xmlns:a16="http://schemas.microsoft.com/office/drawing/2014/main" id="{0E5933F5-078D-AEEF-2F00-3691D422F930}"/>
+              </a:ext>
+            </a:extLst>
+          </p:cNvPr>
+          <p:cNvSpPr txBox="1"/>
+          <p:nvPr/>
+        </p:nvSpPr>
+        <p:spPr>
+          <a:xfrm>
+            <a:off x="1014329" y="2277450"/>
+            <a:ext cx="6096000" cy="369332"/>
+          </a:xfrm>
+          <a:prstGeom prst="rect">
+            <a:avLst/>
+          </a:prstGeom>
+          <a:noFill/>
+        </p:spPr>
+        <p:txBody>
+          <a:bodyPr wrap="square">
+            <a:spAutoFit/>
+          </a:bodyPr>
+          <a:lstStyle/>
+          <a:p>
+            <a:r>
+              <a:rPr lang="en-US" sz="1800" b="0" i="0" dirty="0">
+                <a:solidFill>
+                  <a:srgbClr val="000000"/>
+                </a:solidFill>
+                <a:effectLst/>
+                <a:latin typeface="AdvP3E9109"/>
+              </a:rPr>
+              <a:t>central </a:t>
+            </a:r>
+            <a:r>
+              <a:rPr lang="en-US" sz="1800" b="0" i="0" dirty="0">
+                <a:solidFill>
+                  <a:srgbClr val="000000"/>
+                </a:solidFill>
+                <a:effectLst/>
+                <a:latin typeface="AdvP4B45E8"/>
+              </a:rPr>
+              <a:t>moments</a:t>
+            </a:r>
+            <a:r>
+              <a:rPr lang="en-US" dirty="0"/>
+              <a:t> </a:t>
+            </a:r>
+          </a:p>
+        </p:txBody>
+      </p:sp>
+      <p:sp>
+        <p:nvSpPr>
+          <p:cNvPr id="15" name="TextBox 14">
+            <a:extLst>
+              <a:ext uri="{FF2B5EF4-FFF2-40B4-BE49-F238E27FC236}">
+                <a16:creationId xmlns:a16="http://schemas.microsoft.com/office/drawing/2014/main" id="{B228F8BC-E900-3C7E-9F0C-B366E2C67F99}"/>
+              </a:ext>
+            </a:extLst>
+          </p:cNvPr>
+          <p:cNvSpPr txBox="1"/>
+          <p:nvPr/>
+        </p:nvSpPr>
+        <p:spPr>
+          <a:xfrm>
+            <a:off x="990600" y="3707978"/>
+            <a:ext cx="6096000" cy="646331"/>
+          </a:xfrm>
+          <a:prstGeom prst="rect">
+            <a:avLst/>
+          </a:prstGeom>
+          <a:noFill/>
+        </p:spPr>
+        <p:txBody>
+          <a:bodyPr wrap="square">
+            <a:spAutoFit/>
+          </a:bodyPr>
+          <a:lstStyle/>
+          <a:p>
+            <a:r>
+              <a:rPr lang="en-US" sz="1800" b="0" i="1" dirty="0" err="1">
+                <a:solidFill>
+                  <a:srgbClr val="000000"/>
+                </a:solidFill>
+                <a:effectLst/>
+                <a:latin typeface="AdvP4B45E8"/>
+              </a:rPr>
+              <a:t>pq</a:t>
+            </a:r>
+            <a:r>
+              <a:rPr lang="en-US" sz="1800" b="0" i="0" dirty="0" err="1">
+                <a:solidFill>
+                  <a:srgbClr val="000000"/>
+                </a:solidFill>
+                <a:effectLst/>
+                <a:latin typeface="AdvP4B45E8"/>
+              </a:rPr>
+              <a:t>th</a:t>
+            </a:r>
+            <a:r>
+              <a:rPr lang="en-US" dirty="0"/>
+              <a:t> </a:t>
+            </a:r>
+            <a:r>
+              <a:rPr lang="en-US" sz="1800" b="0" i="0" dirty="0">
+                <a:solidFill>
+                  <a:srgbClr val="000000"/>
+                </a:solidFill>
+                <a:effectLst/>
+                <a:latin typeface="AdvP4B45E8"/>
+              </a:rPr>
+              <a:t>moment of a 2-D density function </a:t>
+            </a:r>
+            <a:r>
+              <a:rPr lang="en-US" sz="1800" b="0" i="0" dirty="0" err="1">
+                <a:solidFill>
+                  <a:srgbClr val="000000"/>
+                </a:solidFill>
+                <a:effectLst/>
+                <a:latin typeface="AdvP3E9109"/>
+              </a:rPr>
+              <a:t>p</a:t>
+            </a:r>
+            <a:r>
+              <a:rPr lang="en-US" sz="1800" b="0" i="0" dirty="0" err="1">
+                <a:solidFill>
+                  <a:srgbClr val="000000"/>
+                </a:solidFill>
+                <a:effectLst/>
+                <a:latin typeface="AdvP4C4E74"/>
+              </a:rPr>
+              <a:t>ð</a:t>
+            </a:r>
+            <a:r>
+              <a:rPr lang="en-US" sz="1800" b="0" i="0" dirty="0" err="1">
+                <a:solidFill>
+                  <a:srgbClr val="000000"/>
+                </a:solidFill>
+                <a:effectLst/>
+                <a:latin typeface="AdvP3E9109"/>
+              </a:rPr>
+              <a:t>x</a:t>
+            </a:r>
+            <a:r>
+              <a:rPr lang="en-US" sz="1800" b="0" i="0" dirty="0">
+                <a:solidFill>
+                  <a:srgbClr val="000000"/>
+                </a:solidFill>
+                <a:effectLst/>
+                <a:latin typeface="AdvP4C4E51"/>
+              </a:rPr>
+              <a:t>; </a:t>
+            </a:r>
+            <a:r>
+              <a:rPr lang="en-US" sz="1800" b="0" i="0" dirty="0" err="1">
+                <a:solidFill>
+                  <a:srgbClr val="000000"/>
+                </a:solidFill>
+                <a:effectLst/>
+                <a:latin typeface="AdvP3E9109"/>
+              </a:rPr>
+              <a:t>y</a:t>
+            </a:r>
+            <a:r>
+              <a:rPr lang="en-US" sz="1800" b="0" i="0" dirty="0" err="1">
+                <a:solidFill>
+                  <a:srgbClr val="000000"/>
+                </a:solidFill>
+                <a:effectLst/>
+                <a:latin typeface="AdvP4C4E74"/>
+              </a:rPr>
+              <a:t>Þ</a:t>
+            </a:r>
+            <a:r>
+              <a:rPr lang="en-US" dirty="0"/>
+              <a:t> </a:t>
+            </a:r>
+            <a:br>
+              <a:rPr lang="en-US" dirty="0"/>
+            </a:br>
+            <a:endParaRPr lang="en-US" dirty="0"/>
+          </a:p>
+        </p:txBody>
+      </p:sp>
+      <p:pic>
+        <p:nvPicPr>
+          <p:cNvPr id="17" name="Picture 16">
+            <a:extLst>
+              <a:ext uri="{FF2B5EF4-FFF2-40B4-BE49-F238E27FC236}">
+                <a16:creationId xmlns:a16="http://schemas.microsoft.com/office/drawing/2014/main" id="{2F7BA3FF-B432-B8C1-B4DB-8093F195B623}"/>
+              </a:ext>
+            </a:extLst>
+          </p:cNvPr>
+          <p:cNvPicPr>
+            <a:picLocks noChangeAspect="1"/>
+          </p:cNvPicPr>
+          <p:nvPr/>
+        </p:nvPicPr>
+        <p:blipFill>
+          <a:blip r:embed="rId5"/>
+          <a:stretch>
+            <a:fillRect/>
+          </a:stretch>
+        </p:blipFill>
+        <p:spPr>
+          <a:xfrm>
+            <a:off x="1014329" y="5339763"/>
+            <a:ext cx="5231789" cy="843837"/>
+          </a:xfrm>
+          <a:prstGeom prst="rect">
+            <a:avLst/>
+          </a:prstGeom>
+        </p:spPr>
+      </p:pic>
+      <p:sp>
+        <p:nvSpPr>
+          <p:cNvPr id="19" name="TextBox 18">
+            <a:extLst>
+              <a:ext uri="{FF2B5EF4-FFF2-40B4-BE49-F238E27FC236}">
+                <a16:creationId xmlns:a16="http://schemas.microsoft.com/office/drawing/2014/main" id="{6C68C467-8B55-0B36-CF3D-CFBC52507C79}"/>
+              </a:ext>
+            </a:extLst>
+          </p:cNvPr>
+          <p:cNvSpPr txBox="1"/>
+          <p:nvPr/>
+        </p:nvSpPr>
+        <p:spPr>
+          <a:xfrm>
+            <a:off x="1054100" y="5034747"/>
+            <a:ext cx="4445000" cy="369332"/>
+          </a:xfrm>
+          <a:prstGeom prst="rect">
+            <a:avLst/>
+          </a:prstGeom>
+          <a:noFill/>
+        </p:spPr>
+        <p:txBody>
+          <a:bodyPr wrap="square">
+            <a:spAutoFit/>
+          </a:bodyPr>
+          <a:lstStyle/>
+          <a:p>
+            <a:r>
+              <a:rPr lang="en-US" sz="1800" b="0" i="0" dirty="0">
+                <a:solidFill>
+                  <a:srgbClr val="000000"/>
+                </a:solidFill>
+                <a:effectLst/>
+                <a:latin typeface="AdvP4B45E8"/>
+              </a:rPr>
+              <a:t>(</a:t>
+            </a:r>
+            <a:r>
+              <a:rPr lang="en-US" sz="1800" b="0" i="0" dirty="0">
+                <a:solidFill>
+                  <a:srgbClr val="000000"/>
+                </a:solidFill>
+                <a:effectLst/>
+                <a:latin typeface="AdvP3E9109"/>
+              </a:rPr>
+              <a:t>p-</a:t>
+            </a:r>
+            <a:r>
+              <a:rPr lang="en-US" sz="1800" b="0" i="0" dirty="0">
+                <a:solidFill>
+                  <a:srgbClr val="000000"/>
+                </a:solidFill>
+                <a:effectLst/>
+                <a:latin typeface="AdvP4C4E74"/>
+              </a:rPr>
+              <a:t> </a:t>
+            </a:r>
+            <a:r>
+              <a:rPr lang="en-US" sz="1800" b="0" i="0" dirty="0">
+                <a:solidFill>
+                  <a:srgbClr val="000000"/>
+                </a:solidFill>
+                <a:effectLst/>
+                <a:latin typeface="AdvP3E9109"/>
+              </a:rPr>
+              <a:t>q</a:t>
+            </a:r>
+            <a:r>
+              <a:rPr lang="en-US" sz="1800" b="0" i="0" dirty="0">
+                <a:solidFill>
+                  <a:srgbClr val="000000"/>
+                </a:solidFill>
+                <a:effectLst/>
+                <a:latin typeface="AdvP4B45E8"/>
+              </a:rPr>
+              <a:t>)</a:t>
+            </a:r>
+            <a:r>
+              <a:rPr lang="en-US" sz="1800" b="0" i="0" dirty="0" err="1">
+                <a:solidFill>
+                  <a:srgbClr val="000000"/>
+                </a:solidFill>
+                <a:effectLst/>
+                <a:latin typeface="AdvP4B45E8"/>
+              </a:rPr>
+              <a:t>th</a:t>
+            </a:r>
+            <a:r>
+              <a:rPr lang="en-US" sz="1800" b="0" i="0" dirty="0">
+                <a:solidFill>
+                  <a:srgbClr val="000000"/>
+                </a:solidFill>
+                <a:effectLst/>
+                <a:latin typeface="AdvP4B45E8"/>
+              </a:rPr>
+              <a:t> central moment of 2-D shape </a:t>
+            </a:r>
+            <a:r>
+              <a:rPr lang="en-US" sz="1800" b="0" i="0" dirty="0">
+                <a:solidFill>
+                  <a:srgbClr val="000000"/>
+                </a:solidFill>
+                <a:effectLst/>
+                <a:latin typeface="AdvP3E9109"/>
+              </a:rPr>
+              <a:t>I(</a:t>
+            </a:r>
+            <a:r>
+              <a:rPr lang="en-US" sz="1800" b="0" i="0" dirty="0" err="1">
+                <a:solidFill>
+                  <a:srgbClr val="000000"/>
+                </a:solidFill>
+                <a:effectLst/>
+                <a:latin typeface="AdvP3E9109"/>
+              </a:rPr>
+              <a:t>x,y</a:t>
+            </a:r>
+            <a:r>
+              <a:rPr lang="en-US" sz="1800" b="0" i="0" dirty="0">
+                <a:solidFill>
+                  <a:srgbClr val="000000"/>
+                </a:solidFill>
+                <a:effectLst/>
+                <a:latin typeface="AdvP3E9109"/>
+              </a:rPr>
+              <a:t>)</a:t>
+            </a:r>
+            <a:endParaRPr lang="en-US" dirty="0"/>
+          </a:p>
+        </p:txBody>
+      </p:sp>
+      <p:pic>
+        <p:nvPicPr>
+          <p:cNvPr id="21" name="Picture 20">
+            <a:extLst>
+              <a:ext uri="{FF2B5EF4-FFF2-40B4-BE49-F238E27FC236}">
+                <a16:creationId xmlns:a16="http://schemas.microsoft.com/office/drawing/2014/main" id="{AAC91A36-C741-CAD1-DA8B-B6CB9AB536BD}"/>
+              </a:ext>
+            </a:extLst>
+          </p:cNvPr>
+          <p:cNvPicPr>
+            <a:picLocks noChangeAspect="1"/>
+          </p:cNvPicPr>
+          <p:nvPr/>
+        </p:nvPicPr>
+        <p:blipFill>
+          <a:blip r:embed="rId6"/>
+          <a:stretch>
+            <a:fillRect/>
+          </a:stretch>
+        </p:blipFill>
+        <p:spPr>
+          <a:xfrm>
+            <a:off x="4846859" y="1470930"/>
+            <a:ext cx="6534958" cy="1157009"/>
+          </a:xfrm>
+          <a:prstGeom prst="rect">
+            <a:avLst/>
+          </a:prstGeom>
+        </p:spPr>
+      </p:pic>
+    </p:spTree>
+    <p:extLst>
+      <p:ext uri="{BB962C8B-B14F-4D97-AF65-F5344CB8AC3E}">
+        <p14:creationId xmlns:p14="http://schemas.microsoft.com/office/powerpoint/2010/main" val="1165967328"/>
+      </p:ext>
+    </p:extLst>
+  </p:cSld>
+  <p:clrMapOvr>
+    <a:masterClrMapping/>
+  </p:clrMapOvr>
+</p:sld>
+</file>
+
+<file path=ppt/slides/slide16.xml><?xml version="1.0" encoding="utf-8"?>
+<p:sld xmlns:a="http://schemas.openxmlformats.org/drawingml/2006/main" xmlns:r="http://schemas.openxmlformats.org/officeDocument/2006/relationships" xmlns:p="http://schemas.openxmlformats.org/presentationml/2006/main">
+  <p:cSld>
+    <p:spTree>
+      <p:nvGrpSpPr>
+        <p:cNvPr id="1" name=""/>
+        <p:cNvGrpSpPr/>
+        <p:nvPr/>
+      </p:nvGrpSpPr>
+      <p:grpSpPr>
+        <a:xfrm>
+          <a:off x="0" y="0"/>
+          <a:ext cx="0" cy="0"/>
+          <a:chOff x="0" y="0"/>
+          <a:chExt cx="0" cy="0"/>
+        </a:xfrm>
+      </p:grpSpPr>
+      <p:sp>
+        <p:nvSpPr>
+          <p:cNvPr id="22" name="Title 21">
+            <a:extLst>
+              <a:ext uri="{FF2B5EF4-FFF2-40B4-BE49-F238E27FC236}">
+                <a16:creationId xmlns:a16="http://schemas.microsoft.com/office/drawing/2014/main" id="{67F29B7B-4A52-05C2-D424-998CF01F4F38}"/>
+              </a:ext>
+            </a:extLst>
+          </p:cNvPr>
+          <p:cNvSpPr>
+            <a:spLocks noGrp="1"/>
+          </p:cNvSpPr>
+          <p:nvPr>
+            <p:ph type="title"/>
+          </p:nvPr>
+        </p:nvSpPr>
+        <p:spPr/>
+        <p:txBody>
+          <a:bodyPr>
+            <a:normAutofit fontScale="90000"/>
+          </a:bodyPr>
+          <a:lstStyle/>
+          <a:p>
+            <a:r>
+              <a:rPr lang="en-US" dirty="0"/>
+              <a:t>Statistical Moments</a:t>
+            </a:r>
+          </a:p>
+        </p:txBody>
+      </p:sp>
+      <p:sp>
+        <p:nvSpPr>
+          <p:cNvPr id="2" name="Footer Placeholder 1">
+            <a:extLst>
+              <a:ext uri="{FF2B5EF4-FFF2-40B4-BE49-F238E27FC236}">
+                <a16:creationId xmlns:a16="http://schemas.microsoft.com/office/drawing/2014/main" id="{4EDA084C-98D6-1C24-9FC4-35FA8E1AD919}"/>
+              </a:ext>
+            </a:extLst>
+          </p:cNvPr>
+          <p:cNvSpPr>
+            <a:spLocks noGrp="1"/>
+          </p:cNvSpPr>
+          <p:nvPr>
+            <p:ph type="ftr" sz="quarter" idx="11"/>
+          </p:nvPr>
+        </p:nvSpPr>
+        <p:spPr/>
+        <p:txBody>
+          <a:bodyPr/>
+          <a:lstStyle/>
+          <a:p>
+            <a:pPr>
+              <a:defRPr/>
+            </a:pPr>
+            <a:r>
+              <a:rPr lang="en-US" dirty="0">
+                <a:solidFill>
+                  <a:srgbClr val="DD8047">
+                    <a:lumMod val="50000"/>
+                  </a:srgbClr>
+                </a:solidFill>
+              </a:rPr>
+              <a:t>Prof. Dr. SMM Ahsan, CSE, KUET</a:t>
+            </a:r>
+          </a:p>
+        </p:txBody>
+      </p:sp>
+      <p:sp>
+        <p:nvSpPr>
+          <p:cNvPr id="3" name="Slide Number Placeholder 2">
+            <a:extLst>
+              <a:ext uri="{FF2B5EF4-FFF2-40B4-BE49-F238E27FC236}">
+                <a16:creationId xmlns:a16="http://schemas.microsoft.com/office/drawing/2014/main" id="{5A864C0E-0C89-52EB-74A1-89756294805B}"/>
+              </a:ext>
+            </a:extLst>
+          </p:cNvPr>
+          <p:cNvSpPr>
+            <a:spLocks noGrp="1"/>
+          </p:cNvSpPr>
+          <p:nvPr>
+            <p:ph type="sldNum" sz="quarter" idx="12"/>
+          </p:nvPr>
+        </p:nvSpPr>
+        <p:spPr/>
+        <p:txBody>
+          <a:bodyPr>
+            <a:normAutofit/>
+          </a:bodyPr>
+          <a:lstStyle/>
+          <a:p>
+            <a:pPr>
+              <a:defRPr/>
+            </a:pPr>
+            <a:fld id="{DA51144F-0BBA-4068-ABEE-4D8D26EE083D}" type="slidenum">
+              <a:rPr lang="en-US" smtClean="0">
+                <a:solidFill>
+                  <a:srgbClr val="DD8047">
+                    <a:lumMod val="50000"/>
+                  </a:srgbClr>
+                </a:solidFill>
+              </a:rPr>
+              <a:pPr>
+                <a:defRPr/>
+              </a:pPr>
+              <a:t>16</a:t>
+            </a:fld>
+            <a:endParaRPr lang="en-US">
+              <a:solidFill>
+                <a:srgbClr val="DD8047">
+                  <a:lumMod val="50000"/>
+                </a:srgbClr>
+              </a:solidFill>
+            </a:endParaRPr>
+          </a:p>
+        </p:txBody>
+      </p:sp>
+      <p:sp>
+        <p:nvSpPr>
+          <p:cNvPr id="15" name="TextBox 14">
+            <a:extLst>
+              <a:ext uri="{FF2B5EF4-FFF2-40B4-BE49-F238E27FC236}">
+                <a16:creationId xmlns:a16="http://schemas.microsoft.com/office/drawing/2014/main" id="{1970358C-C2C2-E253-32A6-4B2CDA14DFE0}"/>
+              </a:ext>
+            </a:extLst>
+          </p:cNvPr>
+          <p:cNvSpPr txBox="1"/>
+          <p:nvPr/>
+        </p:nvSpPr>
+        <p:spPr>
+          <a:xfrm>
+            <a:off x="660706" y="1298045"/>
+            <a:ext cx="6096000" cy="830997"/>
+          </a:xfrm>
+          <a:prstGeom prst="rect">
+            <a:avLst/>
+          </a:prstGeom>
+          <a:noFill/>
+        </p:spPr>
+        <p:txBody>
+          <a:bodyPr wrap="square">
+            <a:spAutoFit/>
+          </a:bodyPr>
+          <a:lstStyle/>
+          <a:p>
+            <a:r>
+              <a:rPr lang="en-US" sz="2400" i="1" dirty="0">
+                <a:solidFill>
+                  <a:srgbClr val="000000"/>
+                </a:solidFill>
+                <a:latin typeface="AdvP4B45E8"/>
+              </a:rPr>
+              <a:t>(</a:t>
+            </a:r>
+            <a:r>
+              <a:rPr lang="en-US" sz="2400" i="1" dirty="0" err="1">
+                <a:solidFill>
+                  <a:srgbClr val="000000"/>
+                </a:solidFill>
+                <a:latin typeface="AdvP4B45E8"/>
+              </a:rPr>
+              <a:t>p</a:t>
+            </a:r>
+            <a:r>
+              <a:rPr lang="en-US" sz="2400" b="0" i="1" dirty="0" err="1">
+                <a:solidFill>
+                  <a:srgbClr val="000000"/>
+                </a:solidFill>
+                <a:effectLst/>
+                <a:latin typeface="AdvP4B45E8"/>
+              </a:rPr>
+              <a:t>+q</a:t>
+            </a:r>
+            <a:r>
+              <a:rPr lang="en-US" sz="2400" b="0" i="1" dirty="0">
+                <a:solidFill>
+                  <a:srgbClr val="000000"/>
+                </a:solidFill>
+                <a:effectLst/>
+                <a:latin typeface="AdvP4B45E8"/>
+              </a:rPr>
+              <a:t>)</a:t>
+            </a:r>
+            <a:r>
+              <a:rPr lang="en-US" sz="2400" b="0" i="0" dirty="0" err="1">
+                <a:solidFill>
+                  <a:srgbClr val="000000"/>
+                </a:solidFill>
+                <a:effectLst/>
+                <a:latin typeface="AdvP4B45E8"/>
+              </a:rPr>
+              <a:t>th</a:t>
+            </a:r>
+            <a:r>
+              <a:rPr lang="en-US" sz="2400" dirty="0"/>
+              <a:t> </a:t>
+            </a:r>
+            <a:r>
+              <a:rPr lang="en-US" sz="2400" b="0" i="0" dirty="0">
+                <a:solidFill>
+                  <a:srgbClr val="000000"/>
+                </a:solidFill>
+                <a:effectLst/>
+                <a:latin typeface="AdvP4B45E8"/>
+              </a:rPr>
+              <a:t>moment of a 2-D density function</a:t>
+            </a:r>
+            <a:br>
+              <a:rPr lang="en-US" sz="2400" dirty="0"/>
+            </a:br>
+            <a:endParaRPr lang="en-US" sz="2400" dirty="0"/>
+          </a:p>
+        </p:txBody>
+      </p:sp>
+      <p:sp>
+        <p:nvSpPr>
+          <p:cNvPr id="19" name="TextBox 18">
+            <a:extLst>
+              <a:ext uri="{FF2B5EF4-FFF2-40B4-BE49-F238E27FC236}">
+                <a16:creationId xmlns:a16="http://schemas.microsoft.com/office/drawing/2014/main" id="{93E5E47A-87DF-DF08-8BAC-DEC6A741754E}"/>
+              </a:ext>
+            </a:extLst>
+          </p:cNvPr>
+          <p:cNvSpPr txBox="1"/>
+          <p:nvPr/>
+        </p:nvSpPr>
+        <p:spPr>
+          <a:xfrm>
+            <a:off x="660706" y="3429000"/>
+            <a:ext cx="4445000" cy="369332"/>
+          </a:xfrm>
+          <a:prstGeom prst="rect">
+            <a:avLst/>
+          </a:prstGeom>
+          <a:noFill/>
+        </p:spPr>
+        <p:txBody>
+          <a:bodyPr wrap="square">
+            <a:spAutoFit/>
+          </a:bodyPr>
+          <a:lstStyle/>
+          <a:p>
+            <a:r>
+              <a:rPr lang="en-US" sz="1800" b="0" i="1" dirty="0">
+                <a:solidFill>
+                  <a:srgbClr val="000000"/>
+                </a:solidFill>
+                <a:effectLst/>
+                <a:latin typeface="Times New Roman" panose="02020603050405020304" pitchFamily="18" charset="0"/>
+                <a:cs typeface="Times New Roman" panose="02020603050405020304" pitchFamily="18" charset="0"/>
+              </a:rPr>
+              <a:t>(</a:t>
+            </a:r>
+            <a:r>
+              <a:rPr lang="en-US" sz="1800" b="0" i="1" dirty="0" err="1">
+                <a:solidFill>
+                  <a:srgbClr val="000000"/>
+                </a:solidFill>
+                <a:effectLst/>
+                <a:latin typeface="Times New Roman" panose="02020603050405020304" pitchFamily="18" charset="0"/>
+                <a:cs typeface="Times New Roman" panose="02020603050405020304" pitchFamily="18" charset="0"/>
+              </a:rPr>
+              <a:t>p+q</a:t>
+            </a:r>
+            <a:r>
+              <a:rPr lang="en-US" sz="1800" b="0" i="1" dirty="0">
+                <a:solidFill>
+                  <a:srgbClr val="000000"/>
+                </a:solidFill>
+                <a:effectLst/>
+                <a:latin typeface="Times New Roman" panose="02020603050405020304" pitchFamily="18" charset="0"/>
+                <a:cs typeface="Times New Roman" panose="02020603050405020304" pitchFamily="18" charset="0"/>
+              </a:rPr>
+              <a:t>)</a:t>
+            </a:r>
+            <a:r>
+              <a:rPr lang="en-US" sz="1800" b="0" i="1" dirty="0" err="1">
+                <a:solidFill>
+                  <a:srgbClr val="000000"/>
+                </a:solidFill>
+                <a:effectLst/>
+                <a:latin typeface="Times New Roman" panose="02020603050405020304" pitchFamily="18" charset="0"/>
+                <a:cs typeface="Times New Roman" panose="02020603050405020304" pitchFamily="18" charset="0"/>
+              </a:rPr>
+              <a:t>th</a:t>
+            </a:r>
+            <a:r>
+              <a:rPr lang="en-US" sz="1800" b="0" i="1" dirty="0">
+                <a:solidFill>
+                  <a:srgbClr val="000000"/>
+                </a:solidFill>
+                <a:effectLst/>
+                <a:latin typeface="Times New Roman" panose="02020603050405020304" pitchFamily="18" charset="0"/>
+                <a:cs typeface="Times New Roman" panose="02020603050405020304" pitchFamily="18" charset="0"/>
+              </a:rPr>
+              <a:t> central moment</a:t>
+            </a:r>
+            <a:endParaRPr lang="en-US" i="1" dirty="0">
+              <a:latin typeface="Times New Roman" panose="02020603050405020304" pitchFamily="18" charset="0"/>
+              <a:cs typeface="Times New Roman" panose="02020603050405020304" pitchFamily="18" charset="0"/>
+            </a:endParaRPr>
+          </a:p>
+        </p:txBody>
+      </p:sp>
+      <p:pic>
+        <p:nvPicPr>
+          <p:cNvPr id="6" name="Picture 5">
+            <a:extLst>
+              <a:ext uri="{FF2B5EF4-FFF2-40B4-BE49-F238E27FC236}">
+                <a16:creationId xmlns:a16="http://schemas.microsoft.com/office/drawing/2014/main" id="{E157ACB7-5CAB-4F9F-AC7D-E7AF9AA08CC3}"/>
+              </a:ext>
+            </a:extLst>
+          </p:cNvPr>
+          <p:cNvPicPr>
+            <a:picLocks noChangeAspect="1"/>
+          </p:cNvPicPr>
+          <p:nvPr/>
+        </p:nvPicPr>
+        <p:blipFill>
+          <a:blip r:embed="rId2"/>
+          <a:stretch>
+            <a:fillRect/>
+          </a:stretch>
+        </p:blipFill>
+        <p:spPr>
+          <a:xfrm>
+            <a:off x="660706" y="1896738"/>
+            <a:ext cx="4186154" cy="1034673"/>
+          </a:xfrm>
+          <a:prstGeom prst="rect">
+            <a:avLst/>
+          </a:prstGeom>
+        </p:spPr>
+      </p:pic>
+      <p:pic>
+        <p:nvPicPr>
+          <p:cNvPr id="10" name="Picture 9">
+            <a:extLst>
+              <a:ext uri="{FF2B5EF4-FFF2-40B4-BE49-F238E27FC236}">
+                <a16:creationId xmlns:a16="http://schemas.microsoft.com/office/drawing/2014/main" id="{0A11EF1E-57A2-9803-2682-6EA0D61BBE3E}"/>
+              </a:ext>
+            </a:extLst>
+          </p:cNvPr>
+          <p:cNvPicPr>
+            <a:picLocks noChangeAspect="1"/>
+          </p:cNvPicPr>
+          <p:nvPr/>
+        </p:nvPicPr>
+        <p:blipFill>
+          <a:blip r:embed="rId3"/>
+          <a:stretch>
+            <a:fillRect/>
+          </a:stretch>
+        </p:blipFill>
+        <p:spPr>
+          <a:xfrm>
+            <a:off x="825500" y="3977207"/>
+            <a:ext cx="4445000" cy="807861"/>
+          </a:xfrm>
+          <a:prstGeom prst="rect">
+            <a:avLst/>
+          </a:prstGeom>
+        </p:spPr>
+      </p:pic>
+      <p:pic>
+        <p:nvPicPr>
+          <p:cNvPr id="14" name="Picture 13">
+            <a:extLst>
+              <a:ext uri="{FF2B5EF4-FFF2-40B4-BE49-F238E27FC236}">
+                <a16:creationId xmlns:a16="http://schemas.microsoft.com/office/drawing/2014/main" id="{B15D2E98-48D1-9EC5-489A-1967259C133B}"/>
+              </a:ext>
+            </a:extLst>
+          </p:cNvPr>
+          <p:cNvPicPr>
+            <a:picLocks noChangeAspect="1"/>
+          </p:cNvPicPr>
+          <p:nvPr/>
+        </p:nvPicPr>
+        <p:blipFill>
+          <a:blip r:embed="rId4"/>
+          <a:stretch>
+            <a:fillRect/>
+          </a:stretch>
+        </p:blipFill>
+        <p:spPr>
+          <a:xfrm>
+            <a:off x="844550" y="5206579"/>
+            <a:ext cx="2958570" cy="783601"/>
+          </a:xfrm>
+          <a:prstGeom prst="rect">
+            <a:avLst/>
+          </a:prstGeom>
+        </p:spPr>
+      </p:pic>
+      <p:pic>
+        <p:nvPicPr>
+          <p:cNvPr id="18" name="Picture 17">
+            <a:extLst>
+              <a:ext uri="{FF2B5EF4-FFF2-40B4-BE49-F238E27FC236}">
+                <a16:creationId xmlns:a16="http://schemas.microsoft.com/office/drawing/2014/main" id="{33D6EE95-5A5E-53D5-8FA0-7EF70DDEFC03}"/>
+              </a:ext>
+            </a:extLst>
+          </p:cNvPr>
+          <p:cNvPicPr>
+            <a:picLocks noChangeAspect="1"/>
+          </p:cNvPicPr>
+          <p:nvPr/>
+        </p:nvPicPr>
+        <p:blipFill>
+          <a:blip r:embed="rId5"/>
+          <a:stretch>
+            <a:fillRect/>
+          </a:stretch>
+        </p:blipFill>
+        <p:spPr>
+          <a:xfrm>
+            <a:off x="7588956" y="3239819"/>
+            <a:ext cx="1512181" cy="826659"/>
+          </a:xfrm>
+          <a:prstGeom prst="rect">
+            <a:avLst/>
+          </a:prstGeom>
+        </p:spPr>
+      </p:pic>
+      <p:pic>
+        <p:nvPicPr>
+          <p:cNvPr id="23" name="Picture 22">
+            <a:extLst>
+              <a:ext uri="{FF2B5EF4-FFF2-40B4-BE49-F238E27FC236}">
+                <a16:creationId xmlns:a16="http://schemas.microsoft.com/office/drawing/2014/main" id="{6E07809E-D6CA-5187-EB35-DB6DAAD8BED1}"/>
+              </a:ext>
+            </a:extLst>
+          </p:cNvPr>
+          <p:cNvPicPr>
+            <a:picLocks noChangeAspect="1"/>
+          </p:cNvPicPr>
+          <p:nvPr/>
+        </p:nvPicPr>
+        <p:blipFill>
+          <a:blip r:embed="rId6"/>
+          <a:stretch>
+            <a:fillRect/>
+          </a:stretch>
+        </p:blipFill>
+        <p:spPr>
+          <a:xfrm>
+            <a:off x="7550856" y="4375821"/>
+            <a:ext cx="2209800" cy="758107"/>
+          </a:xfrm>
+          <a:prstGeom prst="rect">
+            <a:avLst/>
+          </a:prstGeom>
+        </p:spPr>
+      </p:pic>
+      <p:sp>
+        <p:nvSpPr>
+          <p:cNvPr id="25" name="TextBox 24">
+            <a:extLst>
+              <a:ext uri="{FF2B5EF4-FFF2-40B4-BE49-F238E27FC236}">
+                <a16:creationId xmlns:a16="http://schemas.microsoft.com/office/drawing/2014/main" id="{BFDA20E0-8A5F-C05E-1179-50C61DC045E2}"/>
+              </a:ext>
+            </a:extLst>
+          </p:cNvPr>
+          <p:cNvSpPr txBox="1"/>
+          <p:nvPr/>
+        </p:nvSpPr>
+        <p:spPr>
+          <a:xfrm>
+            <a:off x="6010275" y="2590552"/>
+            <a:ext cx="6181724" cy="461665"/>
+          </a:xfrm>
+          <a:prstGeom prst="rect">
+            <a:avLst/>
+          </a:prstGeom>
+          <a:noFill/>
+        </p:spPr>
+        <p:txBody>
+          <a:bodyPr wrap="square">
+            <a:spAutoFit/>
+          </a:bodyPr>
+          <a:lstStyle/>
+          <a:p>
+            <a:r>
+              <a:rPr lang="en-US" sz="2400" b="0" i="1" dirty="0">
+                <a:solidFill>
+                  <a:srgbClr val="242021"/>
+                </a:solidFill>
+                <a:effectLst/>
+                <a:latin typeface="+mj-lt"/>
+              </a:rPr>
+              <a:t>normalized central moment </a:t>
+            </a:r>
+            <a:r>
+              <a:rPr lang="en-US" sz="2400" b="0" i="0" dirty="0">
+                <a:solidFill>
+                  <a:srgbClr val="242021"/>
+                </a:solidFill>
+                <a:effectLst/>
+                <a:latin typeface="+mj-lt"/>
+              </a:rPr>
+              <a:t>of order (</a:t>
+            </a:r>
+            <a:r>
+              <a:rPr lang="en-US" sz="2400" b="0" i="0" dirty="0" err="1">
+                <a:solidFill>
+                  <a:srgbClr val="242021"/>
+                </a:solidFill>
+                <a:effectLst/>
+                <a:latin typeface="+mj-lt"/>
+              </a:rPr>
+              <a:t>p+q</a:t>
+            </a:r>
+            <a:r>
+              <a:rPr lang="en-US" sz="2400" b="0" i="0" dirty="0">
+                <a:solidFill>
+                  <a:srgbClr val="242021"/>
+                </a:solidFill>
+                <a:effectLst/>
+                <a:latin typeface="+mj-lt"/>
+              </a:rPr>
+              <a:t> ) </a:t>
+            </a:r>
+            <a:endParaRPr lang="en-US" sz="2400" dirty="0">
+              <a:latin typeface="+mj-lt"/>
+            </a:endParaRPr>
+          </a:p>
+        </p:txBody>
+      </p:sp>
+      <p:sp>
+        <p:nvSpPr>
+          <p:cNvPr id="27" name="TextBox 26">
+            <a:extLst>
+              <a:ext uri="{FF2B5EF4-FFF2-40B4-BE49-F238E27FC236}">
+                <a16:creationId xmlns:a16="http://schemas.microsoft.com/office/drawing/2014/main" id="{EE31B4A5-A35E-2DEA-9429-2381961D55A0}"/>
+              </a:ext>
+            </a:extLst>
+          </p:cNvPr>
+          <p:cNvSpPr txBox="1"/>
+          <p:nvPr/>
+        </p:nvSpPr>
+        <p:spPr>
+          <a:xfrm>
+            <a:off x="10307196" y="4431708"/>
+            <a:ext cx="1600200" cy="707886"/>
+          </a:xfrm>
+          <a:prstGeom prst="rect">
+            <a:avLst/>
+          </a:prstGeom>
+          <a:noFill/>
+        </p:spPr>
+        <p:txBody>
+          <a:bodyPr wrap="square">
+            <a:spAutoFit/>
+          </a:bodyPr>
+          <a:lstStyle/>
+          <a:p>
+            <a:r>
+              <a:rPr lang="en-US" sz="2000" b="0" i="1" dirty="0">
+                <a:solidFill>
+                  <a:srgbClr val="242021"/>
+                </a:solidFill>
+                <a:effectLst/>
+                <a:latin typeface="+mj-lt"/>
+              </a:rPr>
+              <a:t>p +q</a:t>
+            </a:r>
+            <a:r>
+              <a:rPr lang="en-US" sz="2000" b="0" i="0" dirty="0">
+                <a:solidFill>
+                  <a:srgbClr val="242021"/>
+                </a:solidFill>
+                <a:effectLst/>
+                <a:latin typeface="+mj-lt"/>
+              </a:rPr>
+              <a:t> = 2 3 , ,</a:t>
+            </a:r>
+            <a:br>
+              <a:rPr lang="en-US" sz="2000" dirty="0">
+                <a:latin typeface="+mj-lt"/>
+              </a:rPr>
+            </a:br>
+            <a:endParaRPr lang="en-US" sz="2000" dirty="0">
+              <a:latin typeface="+mj-lt"/>
+            </a:endParaRPr>
+          </a:p>
+        </p:txBody>
+      </p:sp>
+    </p:spTree>
+    <p:extLst>
+      <p:ext uri="{BB962C8B-B14F-4D97-AF65-F5344CB8AC3E}">
+        <p14:creationId xmlns:p14="http://schemas.microsoft.com/office/powerpoint/2010/main" val="3091399445"/>
+      </p:ext>
+    </p:extLst>
+  </p:cSld>
+  <p:clrMapOvr>
+    <a:masterClrMapping/>
+  </p:clrMapOvr>
+</p:sld>
+</file>
+
+<file path=ppt/slides/slide17.xml><?xml version="1.0" encoding="utf-8"?>
+<p:sld xmlns:a="http://schemas.openxmlformats.org/drawingml/2006/main" xmlns:r="http://schemas.openxmlformats.org/officeDocument/2006/relationships" xmlns:p="http://schemas.openxmlformats.org/presentationml/2006/main">
+  <p:cSld>
+    <p:spTree>
+      <p:nvGrpSpPr>
+        <p:cNvPr id="1" name=""/>
+        <p:cNvGrpSpPr/>
+        <p:nvPr/>
+      </p:nvGrpSpPr>
+      <p:grpSpPr>
+        <a:xfrm>
+          <a:off x="0" y="0"/>
+          <a:ext cx="0" cy="0"/>
+          <a:chOff x="0" y="0"/>
+          <a:chExt cx="0" cy="0"/>
+        </a:xfrm>
+      </p:grpSpPr>
+      <p:sp>
+        <p:nvSpPr>
+          <p:cNvPr id="22" name="Title 21">
+            <a:extLst>
+              <a:ext uri="{FF2B5EF4-FFF2-40B4-BE49-F238E27FC236}">
+                <a16:creationId xmlns:a16="http://schemas.microsoft.com/office/drawing/2014/main" id="{67F29B7B-4A52-05C2-D424-998CF01F4F38}"/>
+              </a:ext>
+            </a:extLst>
+          </p:cNvPr>
+          <p:cNvSpPr>
+            <a:spLocks noGrp="1"/>
+          </p:cNvSpPr>
+          <p:nvPr>
+            <p:ph type="title"/>
+          </p:nvPr>
+        </p:nvSpPr>
+        <p:spPr/>
+        <p:txBody>
+          <a:bodyPr>
+            <a:normAutofit fontScale="90000"/>
+          </a:bodyPr>
+          <a:lstStyle/>
+          <a:p>
+            <a:r>
+              <a:rPr lang="en-US" dirty="0"/>
+              <a:t>Hu Moments</a:t>
+            </a:r>
+          </a:p>
+        </p:txBody>
+      </p:sp>
+      <p:sp>
+        <p:nvSpPr>
+          <p:cNvPr id="2" name="Footer Placeholder 1">
+            <a:extLst>
+              <a:ext uri="{FF2B5EF4-FFF2-40B4-BE49-F238E27FC236}">
+                <a16:creationId xmlns:a16="http://schemas.microsoft.com/office/drawing/2014/main" id="{4EDA084C-98D6-1C24-9FC4-35FA8E1AD919}"/>
+              </a:ext>
+            </a:extLst>
+          </p:cNvPr>
+          <p:cNvSpPr>
+            <a:spLocks noGrp="1"/>
+          </p:cNvSpPr>
+          <p:nvPr>
+            <p:ph type="ftr" sz="quarter" idx="11"/>
+          </p:nvPr>
+        </p:nvSpPr>
+        <p:spPr/>
+        <p:txBody>
+          <a:bodyPr/>
+          <a:lstStyle/>
+          <a:p>
+            <a:pPr>
+              <a:defRPr/>
+            </a:pPr>
+            <a:r>
+              <a:rPr lang="en-US">
+                <a:solidFill>
+                  <a:srgbClr val="DD8047">
+                    <a:lumMod val="50000"/>
+                  </a:srgbClr>
+                </a:solidFill>
+              </a:rPr>
+              <a:t>Prof. Dr. SMM Ahsan, CSE, KUET</a:t>
+            </a:r>
+          </a:p>
+        </p:txBody>
+      </p:sp>
+      <p:sp>
+        <p:nvSpPr>
+          <p:cNvPr id="3" name="Slide Number Placeholder 2">
+            <a:extLst>
+              <a:ext uri="{FF2B5EF4-FFF2-40B4-BE49-F238E27FC236}">
+                <a16:creationId xmlns:a16="http://schemas.microsoft.com/office/drawing/2014/main" id="{5A864C0E-0C89-52EB-74A1-89756294805B}"/>
+              </a:ext>
+            </a:extLst>
+          </p:cNvPr>
+          <p:cNvSpPr>
+            <a:spLocks noGrp="1"/>
+          </p:cNvSpPr>
+          <p:nvPr>
+            <p:ph type="sldNum" sz="quarter" idx="12"/>
+          </p:nvPr>
+        </p:nvSpPr>
+        <p:spPr/>
+        <p:txBody>
+          <a:bodyPr>
+            <a:normAutofit/>
+          </a:bodyPr>
+          <a:lstStyle/>
+          <a:p>
+            <a:pPr>
+              <a:defRPr/>
+            </a:pPr>
+            <a:fld id="{DA51144F-0BBA-4068-ABEE-4D8D26EE083D}" type="slidenum">
+              <a:rPr lang="en-US" smtClean="0">
+                <a:solidFill>
+                  <a:srgbClr val="DD8047">
+                    <a:lumMod val="50000"/>
+                  </a:srgbClr>
+                </a:solidFill>
+              </a:rPr>
+              <a:pPr>
+                <a:defRPr/>
+              </a:pPr>
+              <a:t>17</a:t>
             </a:fld>
             <a:endParaRPr lang="en-US">
               <a:solidFill>
@@ -6550,7 +7849,7 @@
 </p:sld>
 </file>
 
-<file path=ppt/slides/slide16.xml><?xml version="1.0" encoding="utf-8"?>
+<file path=ppt/slides/slide18.xml><?xml version="1.0" encoding="utf-8"?>
 <p:sld xmlns:a="http://schemas.openxmlformats.org/drawingml/2006/main" xmlns:r="http://schemas.openxmlformats.org/officeDocument/2006/relationships" xmlns:p="http://schemas.openxmlformats.org/presentationml/2006/main" show="0">
   <p:cSld>
     <p:spTree>
@@ -6759,7 +8058,7 @@
               <a:pPr>
                 <a:defRPr/>
               </a:pPr>
-              <a:t>16</a:t>
+              <a:t>18</a:t>
             </a:fld>
             <a:endParaRPr lang="en-US">
               <a:solidFill>
@@ -6784,7 +8083,7 @@
 </p:sld>
 </file>
 
-<file path=ppt/slides/slide17.xml><?xml version="1.0" encoding="utf-8"?>
+<file path=ppt/slides/slide19.xml><?xml version="1.0" encoding="utf-8"?>
 <p:sld xmlns:a="http://schemas.openxmlformats.org/drawingml/2006/main" xmlns:r="http://schemas.openxmlformats.org/officeDocument/2006/relationships" xmlns:p="http://schemas.openxmlformats.org/presentationml/2006/main">
   <p:cSld>
     <p:spTree>
@@ -6868,7 +8167,7 @@
               <a:pPr>
                 <a:defRPr/>
               </a:pPr>
-              <a:t>17</a:t>
+              <a:t>19</a:t>
             </a:fld>
             <a:endParaRPr lang="en-US" dirty="0">
               <a:solidFill>
@@ -6923,7 +8222,7 @@
 </p:sld>
 </file>
 
-<file path=ppt/slides/slide18.xml><?xml version="1.0" encoding="utf-8"?>
+<file path=ppt/slides/slide2.xml><?xml version="1.0" encoding="utf-8"?>
 <p:sld xmlns:a="http://schemas.openxmlformats.org/drawingml/2006/main" xmlns:r="http://schemas.openxmlformats.org/officeDocument/2006/relationships" xmlns:p="http://schemas.openxmlformats.org/presentationml/2006/main">
   <p:cSld>
     <p:spTree>
@@ -6945,6 +8244,151 @@
           <p:cNvPr id="2" name="Title 1">
             <a:extLst>
               <a:ext uri="{FF2B5EF4-FFF2-40B4-BE49-F238E27FC236}">
+                <a16:creationId xmlns:a16="http://schemas.microsoft.com/office/drawing/2014/main" id="{E442FD9C-350C-483E-A6A2-EDEA7E438DC7}"/>
+              </a:ext>
+            </a:extLst>
+          </p:cNvPr>
+          <p:cNvSpPr>
+            <a:spLocks noGrp="1"/>
+          </p:cNvSpPr>
+          <p:nvPr>
+            <p:ph type="title"/>
+          </p:nvPr>
+        </p:nvSpPr>
+        <p:spPr/>
+        <p:txBody>
+          <a:bodyPr>
+            <a:normAutofit fontScale="90000"/>
+          </a:bodyPr>
+          <a:lstStyle/>
+          <a:p>
+            <a:r>
+              <a:rPr lang="en-US" sz="4400" dirty="0">
+                <a:solidFill>
+                  <a:schemeClr val="accent1">
+                    <a:lumMod val="75000"/>
+                  </a:schemeClr>
+                </a:solidFill>
+                <a:latin typeface="Times New Roman" panose="02020603050405020304" pitchFamily="18" charset="0"/>
+                <a:cs typeface="Times New Roman" panose="02020603050405020304" pitchFamily="18" charset="0"/>
+              </a:rPr>
+              <a:t>Region Descriptors</a:t>
+            </a:r>
+            <a:endParaRPr lang="en-US" dirty="0"/>
+          </a:p>
+        </p:txBody>
+      </p:sp>
+      <p:sp>
+        <p:nvSpPr>
+          <p:cNvPr id="3" name="Content Placeholder 2">
+            <a:extLst>
+              <a:ext uri="{FF2B5EF4-FFF2-40B4-BE49-F238E27FC236}">
+                <a16:creationId xmlns:a16="http://schemas.microsoft.com/office/drawing/2014/main" id="{0A837097-68AB-46E6-B63C-2016FA497523}"/>
+              </a:ext>
+            </a:extLst>
+          </p:cNvPr>
+          <p:cNvSpPr>
+            <a:spLocks noGrp="1"/>
+          </p:cNvSpPr>
+          <p:nvPr>
+            <p:ph idx="1"/>
+          </p:nvPr>
+        </p:nvSpPr>
+        <p:spPr/>
+        <p:txBody>
+          <a:bodyPr/>
+          <a:lstStyle/>
+          <a:p>
+            <a:r>
+              <a:rPr lang="en-GB" altLang="en-US" dirty="0"/>
+              <a:t>Information that lets you recognize a region.</a:t>
+            </a:r>
+          </a:p>
+          <a:p>
+            <a:r>
+              <a:rPr lang="en-US" altLang="en-US" dirty="0"/>
+              <a:t>They focus on the content and texture of objects in an image. </a:t>
+            </a:r>
+          </a:p>
+          <a:p>
+            <a:r>
+              <a:rPr lang="en-US" altLang="en-US" dirty="0"/>
+              <a:t>They describe the distribution of pixel values within a region and capture the spatial relationships between different regions. </a:t>
+            </a:r>
+          </a:p>
+          <a:p>
+            <a:r>
+              <a:rPr lang="en-US" dirty="0"/>
+              <a:t>They extract relevant information from the image and represent it in a way that can be easily compared and matched with other images.</a:t>
+            </a:r>
+          </a:p>
+        </p:txBody>
+      </p:sp>
+      <p:sp>
+        <p:nvSpPr>
+          <p:cNvPr id="4" name="Slide Number Placeholder 3">
+            <a:extLst>
+              <a:ext uri="{FF2B5EF4-FFF2-40B4-BE49-F238E27FC236}">
+                <a16:creationId xmlns:a16="http://schemas.microsoft.com/office/drawing/2014/main" id="{E0A79113-0370-4384-B7FA-44FA1BF2FE87}"/>
+              </a:ext>
+            </a:extLst>
+          </p:cNvPr>
+          <p:cNvSpPr>
+            <a:spLocks noGrp="1"/>
+          </p:cNvSpPr>
+          <p:nvPr>
+            <p:ph type="sldNum" sz="quarter" idx="12"/>
+          </p:nvPr>
+        </p:nvSpPr>
+        <p:spPr/>
+        <p:txBody>
+          <a:bodyPr/>
+          <a:lstStyle/>
+          <a:p>
+            <a:fld id="{F1BBE439-A689-4E67-A7FC-21353A5E3273}" type="slidenum">
+              <a:rPr lang="en-US" smtClean="0"/>
+              <a:pPr/>
+              <a:t>2</a:t>
+            </a:fld>
+            <a:endParaRPr lang="en-US" dirty="0"/>
+          </a:p>
+        </p:txBody>
+      </p:sp>
+    </p:spTree>
+    <p:extLst>
+      <p:ext uri="{BB962C8B-B14F-4D97-AF65-F5344CB8AC3E}">
+        <p14:creationId xmlns:p14="http://schemas.microsoft.com/office/powerpoint/2010/main" val="4197189962"/>
+      </p:ext>
+    </p:extLst>
+  </p:cSld>
+  <p:clrMapOvr>
+    <a:masterClrMapping/>
+  </p:clrMapOvr>
+</p:sld>
+</file>
+
+<file path=ppt/slides/slide20.xml><?xml version="1.0" encoding="utf-8"?>
+<p:sld xmlns:a="http://schemas.openxmlformats.org/drawingml/2006/main" xmlns:r="http://schemas.openxmlformats.org/officeDocument/2006/relationships" xmlns:p="http://schemas.openxmlformats.org/presentationml/2006/main">
+  <p:cSld>
+    <p:spTree>
+      <p:nvGrpSpPr>
+        <p:cNvPr id="1" name=""/>
+        <p:cNvGrpSpPr/>
+        <p:nvPr/>
+      </p:nvGrpSpPr>
+      <p:grpSpPr>
+        <a:xfrm>
+          <a:off x="0" y="0"/>
+          <a:ext cx="0" cy="0"/>
+          <a:chOff x="0" y="0"/>
+          <a:chExt cx="0" cy="0"/>
+        </a:xfrm>
+      </p:grpSpPr>
+      <p:sp>
+        <p:nvSpPr>
+          <p:cNvPr id="2" name="Title 1">
+            <a:extLst>
+              <a:ext uri="{FF2B5EF4-FFF2-40B4-BE49-F238E27FC236}">
                 <a16:creationId xmlns:a16="http://schemas.microsoft.com/office/drawing/2014/main" id="{A3464421-D688-FF45-A6A9-7E05E8A410B3}"/>
               </a:ext>
             </a:extLst>
@@ -7044,7 +8488,7 @@
               <a:pPr>
                 <a:defRPr/>
               </a:pPr>
-              <a:t>18</a:t>
+              <a:t>20</a:t>
             </a:fld>
             <a:endParaRPr lang="en-US" dirty="0">
               <a:solidFill>
@@ -7111,7 +8555,7 @@
 </p:sld>
 </file>
 
-<file path=ppt/slides/slide19.xml><?xml version="1.0" encoding="utf-8"?>
+<file path=ppt/slides/slide21.xml><?xml version="1.0" encoding="utf-8"?>
 <p:sld xmlns:a="http://schemas.openxmlformats.org/drawingml/2006/main" xmlns:r="http://schemas.openxmlformats.org/officeDocument/2006/relationships" xmlns:p="http://schemas.openxmlformats.org/presentationml/2006/main">
   <p:cSld>
     <p:spTree>
@@ -7179,8 +8623,77 @@
           <a:bodyPr/>
           <a:lstStyle/>
           <a:p>
-            <a:pPr marL="0" indent="0">
-              <a:buNone/>
+            <a:pPr marL="514350" indent="-514350" algn="just">
+              <a:buAutoNum type="arabicPeriod"/>
+            </a:pPr>
+            <a:r>
+              <a:rPr lang="en-US" dirty="0"/>
+              <a:t>Take 4 gray scale images.</a:t>
+            </a:r>
+          </a:p>
+          <a:p>
+            <a:pPr marL="514350" indent="-514350" algn="just">
+              <a:buAutoNum type="arabicPeriod"/>
+            </a:pPr>
+            <a:r>
+              <a:rPr lang="en-US" dirty="0"/>
+              <a:t>Appy 5 types of geometric (rotation, scaling, mirroring,..</a:t>
+            </a:r>
+            <a:r>
+              <a:rPr lang="en-US" dirty="0" err="1"/>
+              <a:t>etc</a:t>
+            </a:r>
+            <a:r>
+              <a:rPr lang="en-US" dirty="0"/>
+              <a:t>) and contrast-based operations on each image.</a:t>
+            </a:r>
+          </a:p>
+          <a:p>
+            <a:pPr marL="514350" indent="-514350" algn="just">
+              <a:buAutoNum type="arabicPeriod"/>
+            </a:pPr>
+            <a:r>
+              <a:rPr lang="en-US" dirty="0"/>
+              <a:t> Find </a:t>
+            </a:r>
+            <a:r>
+              <a:rPr lang="en-US" dirty="0" err="1"/>
+              <a:t>upto</a:t>
+            </a:r>
+            <a:r>
+              <a:rPr lang="en-US" dirty="0"/>
+              <a:t> 4</a:t>
+            </a:r>
+            <a:r>
+              <a:rPr lang="en-US" baseline="30000" dirty="0"/>
+              <a:t>th</a:t>
+            </a:r>
+            <a:r>
+              <a:rPr lang="en-US" dirty="0"/>
+              <a:t> Hu-moment of each variant of images as the feature  vector.</a:t>
+            </a:r>
+          </a:p>
+          <a:p>
+            <a:pPr marL="514350" indent="-514350" algn="just">
+              <a:buAutoNum type="arabicPeriod"/>
+            </a:pPr>
+            <a:r>
+              <a:rPr lang="en-US" dirty="0"/>
+              <a:t>Compute Chi-squared distance of 3 query images with the base image to find the best match.</a:t>
+            </a:r>
+          </a:p>
+          <a:p>
+            <a:pPr marL="514350" indent="-514350" algn="just">
+              <a:buAutoNum type="arabicPeriod"/>
+            </a:pPr>
+            <a:r>
+              <a:rPr lang="en-US" dirty="0"/>
+              <a:t>Take a 5x5 patch of any input image and perform step 2, 3 and 4 on the patch. Show the feature tables and matching results in your report.</a:t>
+            </a:r>
+          </a:p>
+          <a:p>
+            <a:pPr marL="514350" indent="-514350" algn="just">
+              <a:buAutoNum type="arabicPeriod"/>
             </a:pPr>
             <a:endParaRPr lang="en-US" dirty="0"/>
           </a:p>
@@ -7210,7 +8723,7 @@
             <a:fld id="{F1BBE439-A689-4E67-A7FC-21353A5E3273}" type="slidenum">
               <a:rPr lang="en-US" smtClean="0"/>
               <a:pPr/>
-              <a:t>19</a:t>
+              <a:t>21</a:t>
             </a:fld>
             <a:endParaRPr lang="en-US" dirty="0"/>
           </a:p>
@@ -7220,151 +8733,6 @@
     <p:extLst>
       <p:ext uri="{BB962C8B-B14F-4D97-AF65-F5344CB8AC3E}">
         <p14:creationId xmlns:p14="http://schemas.microsoft.com/office/powerpoint/2010/main" val="108323618"/>
-      </p:ext>
-    </p:extLst>
-  </p:cSld>
-  <p:clrMapOvr>
-    <a:masterClrMapping/>
-  </p:clrMapOvr>
-</p:sld>
-</file>
-
-<file path=ppt/slides/slide2.xml><?xml version="1.0" encoding="utf-8"?>
-<p:sld xmlns:a="http://schemas.openxmlformats.org/drawingml/2006/main" xmlns:r="http://schemas.openxmlformats.org/officeDocument/2006/relationships" xmlns:p="http://schemas.openxmlformats.org/presentationml/2006/main">
-  <p:cSld>
-    <p:spTree>
-      <p:nvGrpSpPr>
-        <p:cNvPr id="1" name=""/>
-        <p:cNvGrpSpPr/>
-        <p:nvPr/>
-      </p:nvGrpSpPr>
-      <p:grpSpPr>
-        <a:xfrm>
-          <a:off x="0" y="0"/>
-          <a:ext cx="0" cy="0"/>
-          <a:chOff x="0" y="0"/>
-          <a:chExt cx="0" cy="0"/>
-        </a:xfrm>
-      </p:grpSpPr>
-      <p:sp>
-        <p:nvSpPr>
-          <p:cNvPr id="2" name="Title 1">
-            <a:extLst>
-              <a:ext uri="{FF2B5EF4-FFF2-40B4-BE49-F238E27FC236}">
-                <a16:creationId xmlns:a16="http://schemas.microsoft.com/office/drawing/2014/main" id="{E442FD9C-350C-483E-A6A2-EDEA7E438DC7}"/>
-              </a:ext>
-            </a:extLst>
-          </p:cNvPr>
-          <p:cNvSpPr>
-            <a:spLocks noGrp="1"/>
-          </p:cNvSpPr>
-          <p:nvPr>
-            <p:ph type="title"/>
-          </p:nvPr>
-        </p:nvSpPr>
-        <p:spPr/>
-        <p:txBody>
-          <a:bodyPr>
-            <a:normAutofit fontScale="90000"/>
-          </a:bodyPr>
-          <a:lstStyle/>
-          <a:p>
-            <a:r>
-              <a:rPr lang="en-US" sz="4400" dirty="0">
-                <a:solidFill>
-                  <a:schemeClr val="accent1">
-                    <a:lumMod val="75000"/>
-                  </a:schemeClr>
-                </a:solidFill>
-                <a:latin typeface="Times New Roman" panose="02020603050405020304" pitchFamily="18" charset="0"/>
-                <a:cs typeface="Times New Roman" panose="02020603050405020304" pitchFamily="18" charset="0"/>
-              </a:rPr>
-              <a:t>Region Descriptors</a:t>
-            </a:r>
-            <a:endParaRPr lang="en-US" dirty="0"/>
-          </a:p>
-        </p:txBody>
-      </p:sp>
-      <p:sp>
-        <p:nvSpPr>
-          <p:cNvPr id="3" name="Content Placeholder 2">
-            <a:extLst>
-              <a:ext uri="{FF2B5EF4-FFF2-40B4-BE49-F238E27FC236}">
-                <a16:creationId xmlns:a16="http://schemas.microsoft.com/office/drawing/2014/main" id="{0A837097-68AB-46E6-B63C-2016FA497523}"/>
-              </a:ext>
-            </a:extLst>
-          </p:cNvPr>
-          <p:cNvSpPr>
-            <a:spLocks noGrp="1"/>
-          </p:cNvSpPr>
-          <p:nvPr>
-            <p:ph idx="1"/>
-          </p:nvPr>
-        </p:nvSpPr>
-        <p:spPr/>
-        <p:txBody>
-          <a:bodyPr/>
-          <a:lstStyle/>
-          <a:p>
-            <a:r>
-              <a:rPr lang="en-GB" altLang="en-US" dirty="0"/>
-              <a:t>Information that lets you recognize a region.</a:t>
-            </a:r>
-          </a:p>
-          <a:p>
-            <a:r>
-              <a:rPr lang="en-US" altLang="en-US" dirty="0"/>
-              <a:t>They focus on the content and texture of objects in an image. </a:t>
-            </a:r>
-          </a:p>
-          <a:p>
-            <a:r>
-              <a:rPr lang="en-US" altLang="en-US" dirty="0"/>
-              <a:t>They describe the distribution of pixel values within a region and capture the spatial relationships between different regions. </a:t>
-            </a:r>
-          </a:p>
-          <a:p>
-            <a:r>
-              <a:rPr lang="en-US" dirty="0"/>
-              <a:t>They extract relevant information from the image and represent it in a way that can be easily compared and matched with other images.</a:t>
-            </a:r>
-          </a:p>
-        </p:txBody>
-      </p:sp>
-      <p:sp>
-        <p:nvSpPr>
-          <p:cNvPr id="4" name="Slide Number Placeholder 3">
-            <a:extLst>
-              <a:ext uri="{FF2B5EF4-FFF2-40B4-BE49-F238E27FC236}">
-                <a16:creationId xmlns:a16="http://schemas.microsoft.com/office/drawing/2014/main" id="{E0A79113-0370-4384-B7FA-44FA1BF2FE87}"/>
-              </a:ext>
-            </a:extLst>
-          </p:cNvPr>
-          <p:cNvSpPr>
-            <a:spLocks noGrp="1"/>
-          </p:cNvSpPr>
-          <p:nvPr>
-            <p:ph type="sldNum" sz="quarter" idx="12"/>
-          </p:nvPr>
-        </p:nvSpPr>
-        <p:spPr/>
-        <p:txBody>
-          <a:bodyPr/>
-          <a:lstStyle/>
-          <a:p>
-            <a:fld id="{F1BBE439-A689-4E67-A7FC-21353A5E3273}" type="slidenum">
-              <a:rPr lang="en-US" smtClean="0"/>
-              <a:pPr/>
-              <a:t>2</a:t>
-            </a:fld>
-            <a:endParaRPr lang="en-US" dirty="0"/>
-          </a:p>
-        </p:txBody>
-      </p:sp>
-    </p:spTree>
-    <p:extLst>
-      <p:ext uri="{BB962C8B-B14F-4D97-AF65-F5344CB8AC3E}">
-        <p14:creationId xmlns:p14="http://schemas.microsoft.com/office/powerpoint/2010/main" val="4197189962"/>
       </p:ext>
     </p:extLst>
   </p:cSld>
